--- a/DEV-1-16/for_students/DAY-1/ppt/dev1_03.pptx
+++ b/DEV-1-16/for_students/DAY-1/ppt/dev1_03.pptx
@@ -271,7 +271,7 @@
           <a:p>
             <a:fld id="{EF790F8C-5FB9-4EFE-BCC7-F735A3026FD8}" type="datetimeFigureOut">
               <a:rPr lang="ru-RU" smtClean="0"/>
-              <a:t>19.09.2024</a:t>
+              <a:t>05.12.2025</a:t>
             </a:fld>
             <a:endParaRPr lang="ru-RU"/>
           </a:p>
@@ -469,7 +469,7 @@
           <a:p>
             <a:fld id="{EF790F8C-5FB9-4EFE-BCC7-F735A3026FD8}" type="datetimeFigureOut">
               <a:rPr lang="ru-RU" smtClean="0"/>
-              <a:t>19.09.2024</a:t>
+              <a:t>05.12.2025</a:t>
             </a:fld>
             <a:endParaRPr lang="ru-RU"/>
           </a:p>
@@ -677,7 +677,7 @@
           <a:p>
             <a:fld id="{EF790F8C-5FB9-4EFE-BCC7-F735A3026FD8}" type="datetimeFigureOut">
               <a:rPr lang="ru-RU" smtClean="0"/>
-              <a:t>19.09.2024</a:t>
+              <a:t>05.12.2025</a:t>
             </a:fld>
             <a:endParaRPr lang="ru-RU"/>
           </a:p>
@@ -1689,7 +1689,7 @@
           <a:p>
             <a:fld id="{EF790F8C-5FB9-4EFE-BCC7-F735A3026FD8}" type="datetimeFigureOut">
               <a:rPr lang="ru-RU" smtClean="0"/>
-              <a:t>19.09.2024</a:t>
+              <a:t>05.12.2025</a:t>
             </a:fld>
             <a:endParaRPr lang="ru-RU"/>
           </a:p>
@@ -2800,7 +2800,7 @@
           <a:p>
             <a:fld id="{EF790F8C-5FB9-4EFE-BCC7-F735A3026FD8}" type="datetimeFigureOut">
               <a:rPr lang="ru-RU" smtClean="0"/>
-              <a:t>19.09.2024</a:t>
+              <a:t>05.12.2025</a:t>
             </a:fld>
             <a:endParaRPr lang="ru-RU"/>
           </a:p>
@@ -3075,7 +3075,7 @@
           <a:p>
             <a:fld id="{EF790F8C-5FB9-4EFE-BCC7-F735A3026FD8}" type="datetimeFigureOut">
               <a:rPr lang="ru-RU" smtClean="0"/>
-              <a:t>19.09.2024</a:t>
+              <a:t>05.12.2025</a:t>
             </a:fld>
             <a:endParaRPr lang="ru-RU"/>
           </a:p>
@@ -3340,7 +3340,7 @@
           <a:p>
             <a:fld id="{EF790F8C-5FB9-4EFE-BCC7-F735A3026FD8}" type="datetimeFigureOut">
               <a:rPr lang="ru-RU" smtClean="0"/>
-              <a:t>19.09.2024</a:t>
+              <a:t>05.12.2025</a:t>
             </a:fld>
             <a:endParaRPr lang="ru-RU"/>
           </a:p>
@@ -3752,7 +3752,7 @@
           <a:p>
             <a:fld id="{EF790F8C-5FB9-4EFE-BCC7-F735A3026FD8}" type="datetimeFigureOut">
               <a:rPr lang="ru-RU" smtClean="0"/>
-              <a:t>19.09.2024</a:t>
+              <a:t>05.12.2025</a:t>
             </a:fld>
             <a:endParaRPr lang="ru-RU"/>
           </a:p>
@@ -3893,7 +3893,7 @@
           <a:p>
             <a:fld id="{EF790F8C-5FB9-4EFE-BCC7-F735A3026FD8}" type="datetimeFigureOut">
               <a:rPr lang="ru-RU" smtClean="0"/>
-              <a:t>19.09.2024</a:t>
+              <a:t>05.12.2025</a:t>
             </a:fld>
             <a:endParaRPr lang="ru-RU"/>
           </a:p>
@@ -4006,7 +4006,7 @@
           <a:p>
             <a:fld id="{EF790F8C-5FB9-4EFE-BCC7-F735A3026FD8}" type="datetimeFigureOut">
               <a:rPr lang="ru-RU" smtClean="0"/>
-              <a:t>19.09.2024</a:t>
+              <a:t>05.12.2025</a:t>
             </a:fld>
             <a:endParaRPr lang="ru-RU"/>
           </a:p>
@@ -4317,7 +4317,7 @@
           <a:p>
             <a:fld id="{EF790F8C-5FB9-4EFE-BCC7-F735A3026FD8}" type="datetimeFigureOut">
               <a:rPr lang="ru-RU" smtClean="0"/>
-              <a:t>19.09.2024</a:t>
+              <a:t>05.12.2025</a:t>
             </a:fld>
             <a:endParaRPr lang="ru-RU"/>
           </a:p>
@@ -4605,7 +4605,7 @@
           <a:p>
             <a:fld id="{EF790F8C-5FB9-4EFE-BCC7-F735A3026FD8}" type="datetimeFigureOut">
               <a:rPr lang="ru-RU" smtClean="0"/>
-              <a:t>19.09.2024</a:t>
+              <a:t>05.12.2025</a:t>
             </a:fld>
             <a:endParaRPr lang="ru-RU"/>
           </a:p>
@@ -4846,7 +4846,7 @@
           <a:p>
             <a:fld id="{EF790F8C-5FB9-4EFE-BCC7-F735A3026FD8}" type="datetimeFigureOut">
               <a:rPr lang="ru-RU" smtClean="0"/>
-              <a:t>19.09.2024</a:t>
+              <a:t>05.12.2025</a:t>
             </a:fld>
             <a:endParaRPr lang="ru-RU"/>
           </a:p>
@@ -6008,7 +6008,7 @@
 </file>
 
 <file path=ppt/slides/slide1.xml><?xml version="1.0" encoding="utf-8"?>
-<p:sld xmlns:a="http://schemas.openxmlformats.org/drawingml/2006/main" xmlns:r="http://schemas.openxmlformats.org/officeDocument/2006/relationships" xmlns:p="http://schemas.openxmlformats.org/presentationml/2006/main">
+<p:sld xmlns:a="http://schemas.openxmlformats.org/drawingml/2006/main" xmlns:r="http://schemas.openxmlformats.org/officeDocument/2006/relationships" xmlns:p="http://schemas.openxmlformats.org/presentationml/2006/main" showMasterSp="0">
   <p:cSld>
     <p:spTree>
       <p:nvGrpSpPr>
